--- a/lineup.pptx
+++ b/lineup.pptx
@@ -3262,7 +3262,7 @@
                 </a:solidFill>
                 <a:latin typeface="맑은 고딕"/>
               </a:rPr>
-              <a:t>6 대가족반 · 12 소그룹반 + 6 Special · 총 86명</a:t>
+              <a:t>6 대가족반 · 12 소그룹반 + 더 자주 보고 싶은 친구들 · 총 86명</a:t>
             </a:r>
           </a:p>
           <a:p>
@@ -3473,7 +3473,7 @@
                 </a:solidFill>
                 <a:latin typeface="맑은 고딕"/>
               </a:rPr>
-              <a:t>★ 가족장 이윤정    ·    총 15명 (소그룹 2 + Special 1)</a:t>
+              <a:t>★ 가족장 이윤정    ·    총 15명 (소그룹 2 + 보고 싶은 친구들 1)</a:t>
             </a:r>
           </a:p>
         </p:txBody>
@@ -4195,13 +4195,13 @@
               </a:spcAft>
             </a:pPr>
             <a:r>
-              <a:rPr sz="2100" b="1">
+              <a:rPr sz="1700" b="1">
                 <a:solidFill>
                   <a:srgbClr val="EA580C"/>
                 </a:solidFill>
                 <a:latin typeface="맑은 고딕"/>
               </a:rPr>
-              <a:t>Special 1</a:t>
+              <a:t>더 자주 보고 싶은 친구들</a:t>
             </a:r>
             <a:r>
               <a:rPr sz="1300" b="0">
@@ -4226,7 +4226,7 @@
                 </a:solidFill>
                 <a:latin typeface="맑은 고딕"/>
               </a:rPr>
-              <a:t>목회자·대가족 교사 특별 케어</a:t>
+              <a:t>대가족 선생님이 더 자주 함께해요</a:t>
             </a:r>
           </a:p>
           <a:p>
@@ -4523,7 +4523,7 @@
                 </a:solidFill>
                 <a:latin typeface="맑은 고딕"/>
               </a:rPr>
-              <a:t>★ 가족장 전성희    ·    총 14명 (소그룹 2 + Special 1)</a:t>
+              <a:t>★ 가족장 전성희    ·    총 14명 (소그룹 2 + 보고 싶은 친구들 1)</a:t>
             </a:r>
           </a:p>
         </p:txBody>
@@ -5211,13 +5211,13 @@
               </a:spcAft>
             </a:pPr>
             <a:r>
-              <a:rPr sz="2100" b="1">
+              <a:rPr sz="1700" b="1">
                 <a:solidFill>
                   <a:srgbClr val="EA580C"/>
                 </a:solidFill>
                 <a:latin typeface="맑은 고딕"/>
               </a:rPr>
-              <a:t>Special 2</a:t>
+              <a:t>더 자주 보고 싶은 친구들</a:t>
             </a:r>
             <a:r>
               <a:rPr sz="1300" b="0">
@@ -5242,7 +5242,7 @@
                 </a:solidFill>
                 <a:latin typeface="맑은 고딕"/>
               </a:rPr>
-              <a:t>목회자·대가족 교사 특별 케어</a:t>
+              <a:t>대가족 선생님이 더 자주 함께해요</a:t>
             </a:r>
           </a:p>
           <a:p>
@@ -5539,7 +5539,7 @@
                 </a:solidFill>
                 <a:latin typeface="맑은 고딕"/>
               </a:rPr>
-              <a:t>★ 가족장 이수지    ·    총 14명 (소그룹 2 + Special 1)</a:t>
+              <a:t>★ 가족장 이수지    ·    총 14명 (소그룹 2 + 보고 싶은 친구들 1)</a:t>
             </a:r>
           </a:p>
         </p:txBody>
@@ -6227,13 +6227,13 @@
               </a:spcAft>
             </a:pPr>
             <a:r>
-              <a:rPr sz="2100" b="1">
+              <a:rPr sz="1700" b="1">
                 <a:solidFill>
                   <a:srgbClr val="EA580C"/>
                 </a:solidFill>
                 <a:latin typeface="맑은 고딕"/>
               </a:rPr>
-              <a:t>Special 3</a:t>
+              <a:t>더 자주 보고 싶은 친구들</a:t>
             </a:r>
             <a:r>
               <a:rPr sz="1300" b="0">
@@ -6258,7 +6258,7 @@
                 </a:solidFill>
                 <a:latin typeface="맑은 고딕"/>
               </a:rPr>
-              <a:t>목회자·대가족 교사 특별 케어</a:t>
+              <a:t>대가족 선생님이 더 자주 함께해요</a:t>
             </a:r>
           </a:p>
           <a:p>
@@ -6555,7 +6555,7 @@
                 </a:solidFill>
                 <a:latin typeface="맑은 고딕"/>
               </a:rPr>
-              <a:t>★ 가족장 양지현    ·    총 14명 (소그룹 2 + Special 1)</a:t>
+              <a:t>★ 가족장 양지현    ·    총 14명 (소그룹 2 + 보고 싶은 친구들 1)</a:t>
             </a:r>
           </a:p>
         </p:txBody>
@@ -7243,13 +7243,13 @@
               </a:spcAft>
             </a:pPr>
             <a:r>
-              <a:rPr sz="2100" b="1">
+              <a:rPr sz="1700" b="1">
                 <a:solidFill>
                   <a:srgbClr val="EA580C"/>
                 </a:solidFill>
                 <a:latin typeface="맑은 고딕"/>
               </a:rPr>
-              <a:t>Special 4</a:t>
+              <a:t>더 자주 보고 싶은 친구들</a:t>
             </a:r>
             <a:r>
               <a:rPr sz="1300" b="0">
@@ -7274,7 +7274,7 @@
                 </a:solidFill>
                 <a:latin typeface="맑은 고딕"/>
               </a:rPr>
-              <a:t>목회자·대가족 교사 특별 케어</a:t>
+              <a:t>대가족 선생님이 더 자주 함께해요</a:t>
             </a:r>
           </a:p>
           <a:p>
@@ -7571,7 +7571,7 @@
                 </a:solidFill>
                 <a:latin typeface="맑은 고딕"/>
               </a:rPr>
-              <a:t>★ 가족장 오덕현    ·    총 15명 (소그룹 2 + Special 1)</a:t>
+              <a:t>★ 가족장 오덕현    ·    총 15명 (소그룹 2 + 보고 싶은 친구들 1)</a:t>
             </a:r>
           </a:p>
         </p:txBody>
@@ -8293,13 +8293,13 @@
               </a:spcAft>
             </a:pPr>
             <a:r>
-              <a:rPr sz="2100" b="1">
+              <a:rPr sz="1700" b="1">
                 <a:solidFill>
                   <a:srgbClr val="EA580C"/>
                 </a:solidFill>
                 <a:latin typeface="맑은 고딕"/>
               </a:rPr>
-              <a:t>Special 5</a:t>
+              <a:t>더 자주 보고 싶은 친구들</a:t>
             </a:r>
             <a:r>
               <a:rPr sz="1300" b="0">
@@ -8324,7 +8324,7 @@
                 </a:solidFill>
                 <a:latin typeface="맑은 고딕"/>
               </a:rPr>
-              <a:t>목회자·대가족 교사 특별 케어</a:t>
+              <a:t>대가족 선생님이 더 자주 함께해요</a:t>
             </a:r>
           </a:p>
           <a:p>
@@ -8621,7 +8621,7 @@
                 </a:solidFill>
                 <a:latin typeface="맑은 고딕"/>
               </a:rPr>
-              <a:t>★ 가족장 석준원    ·    총 14명 (소그룹 2 + Special 1)</a:t>
+              <a:t>★ 가족장 석준원    ·    총 14명 (소그룹 2 + 보고 싶은 친구들 1)</a:t>
             </a:r>
           </a:p>
         </p:txBody>
@@ -9309,13 +9309,13 @@
               </a:spcAft>
             </a:pPr>
             <a:r>
-              <a:rPr sz="2100" b="1">
+              <a:rPr sz="1700" b="1">
                 <a:solidFill>
                   <a:srgbClr val="EA580C"/>
                 </a:solidFill>
                 <a:latin typeface="맑은 고딕"/>
               </a:rPr>
-              <a:t>Special 6</a:t>
+              <a:t>더 자주 보고 싶은 친구들</a:t>
             </a:r>
             <a:r>
               <a:rPr sz="1300" b="0">
@@ -9340,7 +9340,7 @@
                 </a:solidFill>
                 <a:latin typeface="맑은 고딕"/>
               </a:rPr>
-              <a:t>목회자·대가족 교사 특별 케어</a:t>
+              <a:t>대가족 선생님이 더 자주 함께해요</a:t>
             </a:r>
           </a:p>
           <a:p>

--- a/lineup.pptx
+++ b/lineup.pptx
@@ -3312,7 +3312,7 @@
                 </a:solidFill>
                 <a:latin typeface="맑은 고딕"/>
               </a:rPr>
-              <a:t>내수동교회 고등부 · 발행 2026-06-06</a:t>
+              <a:t>내수동교회 고등부 · 발행 2026-06-08</a:t>
             </a:r>
           </a:p>
         </p:txBody>
@@ -7676,7 +7676,7 @@
                 </a:solidFill>
                 <a:latin typeface="맑은 고딕"/>
               </a:rPr>
-              <a:t>   6명</a:t>
+              <a:t>   5명</a:t>
             </a:r>
           </a:p>
           <a:p>
@@ -7897,40 +7897,6 @@
                 <a:latin typeface="맑은 고딕"/>
               </a:rPr>
               <a:t>  3학년 </a:t>
-            </a:r>
-            <a:r>
-              <a:rPr sz="1400" b="1">
-                <a:solidFill>
-                  <a:srgbClr val="1D4ED8"/>
-                </a:solidFill>
-                <a:latin typeface="맑은 고딕"/>
-              </a:rPr>
-              <a:t>남</a:t>
-            </a:r>
-          </a:p>
-          <a:p>
-            <a:pPr>
-              <a:spcAft>
-                <a:spcPts val="500"/>
-              </a:spcAft>
-            </a:pPr>
-            <a:r>
-              <a:rPr sz="2200" b="1">
-                <a:solidFill>
-                  <a:srgbClr val="1F2937"/>
-                </a:solidFill>
-                <a:latin typeface="맑은 고딕"/>
-              </a:rPr>
-              <a:t>박재영</a:t>
-            </a:r>
-            <a:r>
-              <a:rPr sz="1300" b="0">
-                <a:solidFill>
-                  <a:srgbClr val="6B7280"/>
-                </a:solidFill>
-                <a:latin typeface="맑은 고딕"/>
-              </a:rPr>
-              <a:t>  1학년 </a:t>
             </a:r>
             <a:r>
               <a:rPr sz="1400" b="1">
@@ -8009,7 +7975,7 @@
                 </a:solidFill>
                 <a:latin typeface="맑은 고딕"/>
               </a:rPr>
-              <a:t>   5명</a:t>
+              <a:t>   6명</a:t>
             </a:r>
           </a:p>
           <a:p>
@@ -8119,6 +8085,40 @@
                 <a:latin typeface="맑은 고딕"/>
               </a:rPr>
               <a:t>나호윤</a:t>
+            </a:r>
+            <a:r>
+              <a:rPr sz="1300" b="0">
+                <a:solidFill>
+                  <a:srgbClr val="6B7280"/>
+                </a:solidFill>
+                <a:latin typeface="맑은 고딕"/>
+              </a:rPr>
+              <a:t>  1학년 </a:t>
+            </a:r>
+            <a:r>
+              <a:rPr sz="1400" b="1">
+                <a:solidFill>
+                  <a:srgbClr val="1D4ED8"/>
+                </a:solidFill>
+                <a:latin typeface="맑은 고딕"/>
+              </a:rPr>
+              <a:t>남</a:t>
+            </a:r>
+          </a:p>
+          <a:p>
+            <a:pPr>
+              <a:spcAft>
+                <a:spcPts val="500"/>
+              </a:spcAft>
+            </a:pPr>
+            <a:r>
+              <a:rPr sz="2200" b="1">
+                <a:solidFill>
+                  <a:srgbClr val="1F2937"/>
+                </a:solidFill>
+                <a:latin typeface="맑은 고딕"/>
+              </a:rPr>
+              <a:t>박재영</a:t>
             </a:r>
             <a:r>
               <a:rPr sz="1300" b="0">
